--- a/Data Wiki.pptx
+++ b/Data Wiki.pptx
@@ -775,7 +775,7 @@
           <a:p>
             <a:r>
               <a:rPr lang="en-US" dirty="0"/>
-              <a:t>Путь пользователя: загрузил — сервис разобрал и проиндексировал — ищешь по смыслу слов. Плюс фильтры, статистика и версии.</a:t>
+              <a:t>Путь пользователя: загрузил — сервис разобрал и проиндексировал — ищешь по смыслу слов. Плюс фильтры, статистика, версии и ссылки на просмотр или редактирование.</a:t>
             </a:r>
             <a:endParaRPr lang="en-US" dirty="0"/>
           </a:p>
@@ -2944,7 +2944,7 @@
                 <a:ea typeface="Manrope" pitchFamily="34" charset="-122"/>
                 <a:cs typeface="Manrope" pitchFamily="34" charset="-120"/>
               </a:rPr>
-              <a:t>Обязательная часть и дополнительные пункты: несколько методов скоринга, гибрид, JWT, веб-клиент</a:t>
+              <a:t>Обязательная часть и дополнительные пункты: несколько методов скоринга, гибрид, JWT, веб-клиент, шаринг по ссылке</a:t>
             </a:r>
             <a:endParaRPr lang="en-US" sz="1500" dirty="0"/>
           </a:p>
@@ -3144,7 +3144,7 @@
         <p:spPr>
           <a:xfrm>
             <a:off x="1803400" y="5412780"/>
-            <a:ext cx="5998369" cy="528241"/>
+            <a:ext cx="4130516" cy="528241"/>
           </a:xfrm>
           <a:prstGeom prst="rect">
             <a:avLst/>
@@ -3173,7 +3173,7 @@
                 <a:ea typeface="Manrope" pitchFamily="34" charset="-122"/>
                 <a:cs typeface="Manrope" pitchFamily="34" charset="-120"/>
               </a:rPr>
-              <a:t>Дальше — демо-видео</a:t>
+              <a:t>Дальше — демо</a:t>
             </a:r>
             <a:endParaRPr lang="en-US" sz="3600" dirty="0"/>
           </a:p>
@@ -5412,7 +5412,7 @@
                 <a:ea typeface="Manrope" pitchFamily="34" charset="-122"/>
                 <a:cs typeface="Manrope" pitchFamily="34" charset="-120"/>
               </a:rPr>
-              <a:t>Версии и личное пространство</a:t>
+              <a:t>Версии и шаринг</a:t>
             </a:r>
             <a:endParaRPr lang="en-US" sz="1600" dirty="0"/>
           </a:p>
@@ -5456,7 +5456,7 @@
                 <a:ea typeface="Manrope" pitchFamily="34" charset="-122"/>
                 <a:cs typeface="Manrope" pitchFamily="34" charset="-120"/>
               </a:rPr>
-              <a:t>Каждая правка — версия; у каждого свои документы</a:t>
+              <a:t>Каждая правка — версия; свои документы, доступ по ссылке</a:t>
             </a:r>
             <a:endParaRPr lang="en-US" sz="1400" dirty="0"/>
           </a:p>
@@ -11828,7 +11828,7 @@
                 <a:ea typeface="Manrope" pitchFamily="34" charset="-122"/>
                 <a:cs typeface="Manrope" pitchFamily="34" charset="-120"/>
               </a:rPr>
-              <a:t>Документ доступен только владельцу</a:t>
+              <a:t>Доступ — владелец и ссылки на просмотр или правку</a:t>
             </a:r>
             <a:endParaRPr lang="en-US" sz="1500" dirty="0"/>
           </a:p>
@@ -11996,7 +11996,7 @@
                 <a:ea typeface="Manrope" pitchFamily="34" charset="-122"/>
                 <a:cs typeface="Manrope" pitchFamily="34" charset="-120"/>
               </a:rPr>
-              <a:t>Шаринг документов и команды — заделы уже в архитектуре</a:t>
+              <a:t>Команды и общие пространства поверх шаринга по ссылке</a:t>
             </a:r>
             <a:endParaRPr lang="en-US" sz="1500" dirty="0"/>
           </a:p>
